--- a/docs/SpeakSync-pitch.pptx
+++ b/docs/SpeakSync-pitch.pptx
@@ -5,18 +5,18 @@
     <p:sldMasterId id="2147483648" r:id="rId1"/>
   </p:sldMasterIdLst>
   <p:sldIdLst>
-    <p:sldId id="256" r:id="rId7"/>
-    <p:sldId id="257" r:id="rId8"/>
-    <p:sldId id="258" r:id="rId9"/>
-    <p:sldId id="259" r:id="rId10"/>
-    <p:sldId id="260" r:id="rId11"/>
-    <p:sldId id="261" r:id="rId12"/>
-    <p:sldId id="262" r:id="rId13"/>
-    <p:sldId id="263" r:id="rId14"/>
-    <p:sldId id="264" r:id="rId15"/>
-    <p:sldId id="265" r:id="rId16"/>
+    <p:sldId id="256" r:id="rId2"/>
+    <p:sldId id="257" r:id="rId3"/>
+    <p:sldId id="258" r:id="rId4"/>
+    <p:sldId id="259" r:id="rId5"/>
+    <p:sldId id="260" r:id="rId6"/>
+    <p:sldId id="261" r:id="rId7"/>
+    <p:sldId id="262" r:id="rId8"/>
+    <p:sldId id="263" r:id="rId9"/>
+    <p:sldId id="264" r:id="rId10"/>
+    <p:sldId id="265" r:id="rId11"/>
   </p:sldIdLst>
-  <p:sldSz cx="12191695" cy="6858000" type="screen4x3"/>
+  <p:sldSz cx="12192000" cy="6858000"/>
   <p:notesSz cx="6858000" cy="9144000"/>
   <p:defaultTextStyle>
     <a:defPPr>
@@ -113,6 +113,22 @@
       </a:defRPr>
     </a:lvl9pPr>
   </p:defaultTextStyle>
+  <p:extLst>
+    <p:ext uri="{EFAFB233-063F-42B5-8137-9DF3F51BA10A}">
+      <p15:sldGuideLst xmlns:p15="http://schemas.microsoft.com/office/powerpoint/2012/main">
+        <p15:guide id="1" orient="horz" pos="2160">
+          <p15:clr>
+            <a:srgbClr val="A4A3A4"/>
+          </p15:clr>
+        </p15:guide>
+        <p15:guide id="2" pos="2880">
+          <p15:clr>
+            <a:srgbClr val="A4A3A4"/>
+          </p15:clr>
+        </p15:guide>
+      </p15:sldGuideLst>
+    </p:ext>
+  </p:extLst>
 </p:presentation>
 </file>
 
@@ -154,10 +170,9 @@
           <a:lstStyle/>
           <a:p>
             <a:r>
-              <a:rPr lang="en-US" smtClean="0"/>
+              <a:rPr lang="en-US"/>
               <a:t>Click to edit Master title style</a:t>
             </a:r>
-            <a:endParaRPr lang="en-US"/>
           </a:p>
         </p:txBody>
       </p:sp>
@@ -273,10 +288,9 @@
           </a:lstStyle>
           <a:p>
             <a:r>
-              <a:rPr lang="en-US" smtClean="0"/>
+              <a:rPr lang="en-US"/>
               <a:t>Click to edit Master subtitle style</a:t>
             </a:r>
-            <a:endParaRPr lang="en-US"/>
           </a:p>
         </p:txBody>
       </p:sp>
@@ -297,7 +311,7 @@
           <a:p>
             <a:fld id="{5BCAD085-E8A6-8845-BD4E-CB4CCA059FC4}" type="datetimeFigureOut">
               <a:rPr lang="en-US" smtClean="0"/>
-              <a:t>1/27/13</a:t>
+              <a:t>7/5/2026</a:t>
             </a:fld>
             <a:endParaRPr lang="en-US"/>
           </a:p>
@@ -391,10 +405,9 @@
           <a:lstStyle/>
           <a:p>
             <a:r>
-              <a:rPr lang="en-US" smtClean="0"/>
+              <a:rPr lang="en-US"/>
               <a:t>Click to edit Master title style</a:t>
             </a:r>
-            <a:endParaRPr lang="en-US"/>
           </a:p>
         </p:txBody>
       </p:sp>
@@ -415,38 +428,37 @@
           <a:p>
             <a:pPr lvl="0"/>
             <a:r>
-              <a:rPr lang="en-US" smtClean="0"/>
+              <a:rPr lang="en-US"/>
               <a:t>Click to edit Master text styles</a:t>
             </a:r>
           </a:p>
           <a:p>
             <a:pPr lvl="1"/>
             <a:r>
-              <a:rPr lang="en-US" smtClean="0"/>
+              <a:rPr lang="en-US"/>
               <a:t>Second level</a:t>
             </a:r>
           </a:p>
           <a:p>
             <a:pPr lvl="2"/>
             <a:r>
-              <a:rPr lang="en-US" smtClean="0"/>
+              <a:rPr lang="en-US"/>
               <a:t>Third level</a:t>
             </a:r>
           </a:p>
           <a:p>
             <a:pPr lvl="3"/>
             <a:r>
-              <a:rPr lang="en-US" smtClean="0"/>
+              <a:rPr lang="en-US"/>
               <a:t>Fourth level</a:t>
             </a:r>
           </a:p>
           <a:p>
             <a:pPr lvl="4"/>
             <a:r>
-              <a:rPr lang="en-US" smtClean="0"/>
+              <a:rPr lang="en-US"/>
               <a:t>Fifth level</a:t>
             </a:r>
-            <a:endParaRPr lang="en-US"/>
           </a:p>
         </p:txBody>
       </p:sp>
@@ -467,7 +479,7 @@
           <a:p>
             <a:fld id="{5BCAD085-E8A6-8845-BD4E-CB4CCA059FC4}" type="datetimeFigureOut">
               <a:rPr lang="en-US" smtClean="0"/>
-              <a:t>1/27/13</a:t>
+              <a:t>7/5/2026</a:t>
             </a:fld>
             <a:endParaRPr lang="en-US"/>
           </a:p>
@@ -566,10 +578,9 @@
           <a:lstStyle/>
           <a:p>
             <a:r>
-              <a:rPr lang="en-US" smtClean="0"/>
+              <a:rPr lang="en-US"/>
               <a:t>Click to edit Master title style</a:t>
             </a:r>
-            <a:endParaRPr lang="en-US"/>
           </a:p>
         </p:txBody>
       </p:sp>
@@ -595,38 +606,37 @@
           <a:p>
             <a:pPr lvl="0"/>
             <a:r>
-              <a:rPr lang="en-US" smtClean="0"/>
+              <a:rPr lang="en-US"/>
               <a:t>Click to edit Master text styles</a:t>
             </a:r>
           </a:p>
           <a:p>
             <a:pPr lvl="1"/>
             <a:r>
-              <a:rPr lang="en-US" smtClean="0"/>
+              <a:rPr lang="en-US"/>
               <a:t>Second level</a:t>
             </a:r>
           </a:p>
           <a:p>
             <a:pPr lvl="2"/>
             <a:r>
-              <a:rPr lang="en-US" smtClean="0"/>
+              <a:rPr lang="en-US"/>
               <a:t>Third level</a:t>
             </a:r>
           </a:p>
           <a:p>
             <a:pPr lvl="3"/>
             <a:r>
-              <a:rPr lang="en-US" smtClean="0"/>
+              <a:rPr lang="en-US"/>
               <a:t>Fourth level</a:t>
             </a:r>
           </a:p>
           <a:p>
             <a:pPr lvl="4"/>
             <a:r>
-              <a:rPr lang="en-US" smtClean="0"/>
+              <a:rPr lang="en-US"/>
               <a:t>Fifth level</a:t>
             </a:r>
-            <a:endParaRPr lang="en-US"/>
           </a:p>
         </p:txBody>
       </p:sp>
@@ -647,7 +657,7 @@
           <a:p>
             <a:fld id="{5BCAD085-E8A6-8845-BD4E-CB4CCA059FC4}" type="datetimeFigureOut">
               <a:rPr lang="en-US" smtClean="0"/>
-              <a:t>1/27/13</a:t>
+              <a:t>7/5/2026</a:t>
             </a:fld>
             <a:endParaRPr lang="en-US"/>
           </a:p>
@@ -741,10 +751,9 @@
           <a:lstStyle/>
           <a:p>
             <a:r>
-              <a:rPr lang="en-US" smtClean="0"/>
+              <a:rPr lang="en-US"/>
               <a:t>Click to edit Master title style</a:t>
             </a:r>
-            <a:endParaRPr lang="en-US"/>
           </a:p>
         </p:txBody>
       </p:sp>
@@ -765,38 +774,37 @@
           <a:p>
             <a:pPr lvl="0"/>
             <a:r>
-              <a:rPr lang="en-US" smtClean="0"/>
+              <a:rPr lang="en-US"/>
               <a:t>Click to edit Master text styles</a:t>
             </a:r>
           </a:p>
           <a:p>
             <a:pPr lvl="1"/>
             <a:r>
-              <a:rPr lang="en-US" smtClean="0"/>
+              <a:rPr lang="en-US"/>
               <a:t>Second level</a:t>
             </a:r>
           </a:p>
           <a:p>
             <a:pPr lvl="2"/>
             <a:r>
-              <a:rPr lang="en-US" smtClean="0"/>
+              <a:rPr lang="en-US"/>
               <a:t>Third level</a:t>
             </a:r>
           </a:p>
           <a:p>
             <a:pPr lvl="3"/>
             <a:r>
-              <a:rPr lang="en-US" smtClean="0"/>
+              <a:rPr lang="en-US"/>
               <a:t>Fourth level</a:t>
             </a:r>
           </a:p>
           <a:p>
             <a:pPr lvl="4"/>
             <a:r>
-              <a:rPr lang="en-US" smtClean="0"/>
+              <a:rPr lang="en-US"/>
               <a:t>Fifth level</a:t>
             </a:r>
-            <a:endParaRPr lang="en-US"/>
           </a:p>
         </p:txBody>
       </p:sp>
@@ -817,7 +825,7 @@
           <a:p>
             <a:fld id="{5BCAD085-E8A6-8845-BD4E-CB4CCA059FC4}" type="datetimeFigureOut">
               <a:rPr lang="en-US" smtClean="0"/>
-              <a:t>1/27/13</a:t>
+              <a:t>7/5/2026</a:t>
             </a:fld>
             <a:endParaRPr lang="en-US"/>
           </a:p>
@@ -920,10 +928,9 @@
           </a:lstStyle>
           <a:p>
             <a:r>
-              <a:rPr lang="en-US" smtClean="0"/>
+              <a:rPr lang="en-US"/>
               <a:t>Click to edit Master title style</a:t>
             </a:r>
-            <a:endParaRPr lang="en-US"/>
           </a:p>
         </p:txBody>
       </p:sp>
@@ -1040,7 +1047,7 @@
           <a:p>
             <a:pPr lvl="0"/>
             <a:r>
-              <a:rPr lang="en-US" smtClean="0"/>
+              <a:rPr lang="en-US"/>
               <a:t>Click to edit Master text styles</a:t>
             </a:r>
           </a:p>
@@ -1063,7 +1070,7 @@
           <a:p>
             <a:fld id="{5BCAD085-E8A6-8845-BD4E-CB4CCA059FC4}" type="datetimeFigureOut">
               <a:rPr lang="en-US" smtClean="0"/>
-              <a:t>1/27/13</a:t>
+              <a:t>7/5/2026</a:t>
             </a:fld>
             <a:endParaRPr lang="en-US"/>
           </a:p>
@@ -1157,10 +1164,9 @@
           <a:lstStyle/>
           <a:p>
             <a:r>
-              <a:rPr lang="en-US" smtClean="0"/>
+              <a:rPr lang="en-US"/>
               <a:t>Click to edit Master title style</a:t>
             </a:r>
-            <a:endParaRPr lang="en-US"/>
           </a:p>
         </p:txBody>
       </p:sp>
@@ -1214,38 +1220,37 @@
           <a:p>
             <a:pPr lvl="0"/>
             <a:r>
-              <a:rPr lang="en-US" smtClean="0"/>
+              <a:rPr lang="en-US"/>
               <a:t>Click to edit Master text styles</a:t>
             </a:r>
           </a:p>
           <a:p>
             <a:pPr lvl="1"/>
             <a:r>
-              <a:rPr lang="en-US" smtClean="0"/>
+              <a:rPr lang="en-US"/>
               <a:t>Second level</a:t>
             </a:r>
           </a:p>
           <a:p>
             <a:pPr lvl="2"/>
             <a:r>
-              <a:rPr lang="en-US" smtClean="0"/>
+              <a:rPr lang="en-US"/>
               <a:t>Third level</a:t>
             </a:r>
           </a:p>
           <a:p>
             <a:pPr lvl="3"/>
             <a:r>
-              <a:rPr lang="en-US" smtClean="0"/>
+              <a:rPr lang="en-US"/>
               <a:t>Fourth level</a:t>
             </a:r>
           </a:p>
           <a:p>
             <a:pPr lvl="4"/>
             <a:r>
-              <a:rPr lang="en-US" smtClean="0"/>
+              <a:rPr lang="en-US"/>
               <a:t>Fifth level</a:t>
             </a:r>
-            <a:endParaRPr lang="en-US"/>
           </a:p>
         </p:txBody>
       </p:sp>
@@ -1299,38 +1304,37 @@
           <a:p>
             <a:pPr lvl="0"/>
             <a:r>
-              <a:rPr lang="en-US" smtClean="0"/>
+              <a:rPr lang="en-US"/>
               <a:t>Click to edit Master text styles</a:t>
             </a:r>
           </a:p>
           <a:p>
             <a:pPr lvl="1"/>
             <a:r>
-              <a:rPr lang="en-US" smtClean="0"/>
+              <a:rPr lang="en-US"/>
               <a:t>Second level</a:t>
             </a:r>
           </a:p>
           <a:p>
             <a:pPr lvl="2"/>
             <a:r>
-              <a:rPr lang="en-US" smtClean="0"/>
+              <a:rPr lang="en-US"/>
               <a:t>Third level</a:t>
             </a:r>
           </a:p>
           <a:p>
             <a:pPr lvl="3"/>
             <a:r>
-              <a:rPr lang="en-US" smtClean="0"/>
+              <a:rPr lang="en-US"/>
               <a:t>Fourth level</a:t>
             </a:r>
           </a:p>
           <a:p>
             <a:pPr lvl="4"/>
             <a:r>
-              <a:rPr lang="en-US" smtClean="0"/>
+              <a:rPr lang="en-US"/>
               <a:t>Fifth level</a:t>
             </a:r>
-            <a:endParaRPr lang="en-US"/>
           </a:p>
         </p:txBody>
       </p:sp>
@@ -1351,7 +1355,7 @@
           <a:p>
             <a:fld id="{5BCAD085-E8A6-8845-BD4E-CB4CCA059FC4}" type="datetimeFigureOut">
               <a:rPr lang="en-US" smtClean="0"/>
-              <a:t>1/27/13</a:t>
+              <a:t>7/5/2026</a:t>
             </a:fld>
             <a:endParaRPr lang="en-US"/>
           </a:p>
@@ -1449,10 +1453,9 @@
           </a:lstStyle>
           <a:p>
             <a:r>
-              <a:rPr lang="en-US" smtClean="0"/>
+              <a:rPr lang="en-US"/>
               <a:t>Click to edit Master title style</a:t>
             </a:r>
-            <a:endParaRPr lang="en-US"/>
           </a:p>
         </p:txBody>
       </p:sp>
@@ -1515,7 +1518,7 @@
           <a:p>
             <a:pPr lvl="0"/>
             <a:r>
-              <a:rPr lang="en-US" smtClean="0"/>
+              <a:rPr lang="en-US"/>
               <a:t>Click to edit Master text styles</a:t>
             </a:r>
           </a:p>
@@ -1571,38 +1574,37 @@
           <a:p>
             <a:pPr lvl="0"/>
             <a:r>
-              <a:rPr lang="en-US" smtClean="0"/>
+              <a:rPr lang="en-US"/>
               <a:t>Click to edit Master text styles</a:t>
             </a:r>
           </a:p>
           <a:p>
             <a:pPr lvl="1"/>
             <a:r>
-              <a:rPr lang="en-US" smtClean="0"/>
+              <a:rPr lang="en-US"/>
               <a:t>Second level</a:t>
             </a:r>
           </a:p>
           <a:p>
             <a:pPr lvl="2"/>
             <a:r>
-              <a:rPr lang="en-US" smtClean="0"/>
+              <a:rPr lang="en-US"/>
               <a:t>Third level</a:t>
             </a:r>
           </a:p>
           <a:p>
             <a:pPr lvl="3"/>
             <a:r>
-              <a:rPr lang="en-US" smtClean="0"/>
+              <a:rPr lang="en-US"/>
               <a:t>Fourth level</a:t>
             </a:r>
           </a:p>
           <a:p>
             <a:pPr lvl="4"/>
             <a:r>
-              <a:rPr lang="en-US" smtClean="0"/>
+              <a:rPr lang="en-US"/>
               <a:t>Fifth level</a:t>
             </a:r>
-            <a:endParaRPr lang="en-US"/>
           </a:p>
         </p:txBody>
       </p:sp>
@@ -1665,7 +1667,7 @@
           <a:p>
             <a:pPr lvl="0"/>
             <a:r>
-              <a:rPr lang="en-US" smtClean="0"/>
+              <a:rPr lang="en-US"/>
               <a:t>Click to edit Master text styles</a:t>
             </a:r>
           </a:p>
@@ -1721,38 +1723,37 @@
           <a:p>
             <a:pPr lvl="0"/>
             <a:r>
-              <a:rPr lang="en-US" smtClean="0"/>
+              <a:rPr lang="en-US"/>
               <a:t>Click to edit Master text styles</a:t>
             </a:r>
           </a:p>
           <a:p>
             <a:pPr lvl="1"/>
             <a:r>
-              <a:rPr lang="en-US" smtClean="0"/>
+              <a:rPr lang="en-US"/>
               <a:t>Second level</a:t>
             </a:r>
           </a:p>
           <a:p>
             <a:pPr lvl="2"/>
             <a:r>
-              <a:rPr lang="en-US" smtClean="0"/>
+              <a:rPr lang="en-US"/>
               <a:t>Third level</a:t>
             </a:r>
           </a:p>
           <a:p>
             <a:pPr lvl="3"/>
             <a:r>
-              <a:rPr lang="en-US" smtClean="0"/>
+              <a:rPr lang="en-US"/>
               <a:t>Fourth level</a:t>
             </a:r>
           </a:p>
           <a:p>
             <a:pPr lvl="4"/>
             <a:r>
-              <a:rPr lang="en-US" smtClean="0"/>
+              <a:rPr lang="en-US"/>
               <a:t>Fifth level</a:t>
             </a:r>
-            <a:endParaRPr lang="en-US"/>
           </a:p>
         </p:txBody>
       </p:sp>
@@ -1773,7 +1774,7 @@
           <a:p>
             <a:fld id="{5BCAD085-E8A6-8845-BD4E-CB4CCA059FC4}" type="datetimeFigureOut">
               <a:rPr lang="en-US" smtClean="0"/>
-              <a:t>1/27/13</a:t>
+              <a:t>7/5/2026</a:t>
             </a:fld>
             <a:endParaRPr lang="en-US"/>
           </a:p>
@@ -1867,10 +1868,9 @@
           <a:lstStyle/>
           <a:p>
             <a:r>
-              <a:rPr lang="en-US" smtClean="0"/>
+              <a:rPr lang="en-US"/>
               <a:t>Click to edit Master title style</a:t>
             </a:r>
-            <a:endParaRPr lang="en-US"/>
           </a:p>
         </p:txBody>
       </p:sp>
@@ -1891,7 +1891,7 @@
           <a:p>
             <a:fld id="{5BCAD085-E8A6-8845-BD4E-CB4CCA059FC4}" type="datetimeFigureOut">
               <a:rPr lang="en-US" smtClean="0"/>
-              <a:t>1/27/13</a:t>
+              <a:t>7/5/2026</a:t>
             </a:fld>
             <a:endParaRPr lang="en-US"/>
           </a:p>
@@ -1986,7 +1986,7 @@
           <a:p>
             <a:fld id="{5BCAD085-E8A6-8845-BD4E-CB4CCA059FC4}" type="datetimeFigureOut">
               <a:rPr lang="en-US" smtClean="0"/>
-              <a:t>1/27/13</a:t>
+              <a:t>7/5/2026</a:t>
             </a:fld>
             <a:endParaRPr lang="en-US"/>
           </a:p>
@@ -2089,10 +2089,9 @@
           </a:lstStyle>
           <a:p>
             <a:r>
-              <a:rPr lang="en-US" smtClean="0"/>
+              <a:rPr lang="en-US"/>
               <a:t>Click to edit Master title style</a:t>
             </a:r>
-            <a:endParaRPr lang="en-US"/>
           </a:p>
         </p:txBody>
       </p:sp>
@@ -2146,38 +2145,37 @@
           <a:p>
             <a:pPr lvl="0"/>
             <a:r>
-              <a:rPr lang="en-US" smtClean="0"/>
+              <a:rPr lang="en-US"/>
               <a:t>Click to edit Master text styles</a:t>
             </a:r>
           </a:p>
           <a:p>
             <a:pPr lvl="1"/>
             <a:r>
-              <a:rPr lang="en-US" smtClean="0"/>
+              <a:rPr lang="en-US"/>
               <a:t>Second level</a:t>
             </a:r>
           </a:p>
           <a:p>
             <a:pPr lvl="2"/>
             <a:r>
-              <a:rPr lang="en-US" smtClean="0"/>
+              <a:rPr lang="en-US"/>
               <a:t>Third level</a:t>
             </a:r>
           </a:p>
           <a:p>
             <a:pPr lvl="3"/>
             <a:r>
-              <a:rPr lang="en-US" smtClean="0"/>
+              <a:rPr lang="en-US"/>
               <a:t>Fourth level</a:t>
             </a:r>
           </a:p>
           <a:p>
             <a:pPr lvl="4"/>
             <a:r>
-              <a:rPr lang="en-US" smtClean="0"/>
+              <a:rPr lang="en-US"/>
               <a:t>Fifth level</a:t>
             </a:r>
-            <a:endParaRPr lang="en-US"/>
           </a:p>
         </p:txBody>
       </p:sp>
@@ -2240,7 +2238,7 @@
           <a:p>
             <a:pPr lvl="0"/>
             <a:r>
-              <a:rPr lang="en-US" smtClean="0"/>
+              <a:rPr lang="en-US"/>
               <a:t>Click to edit Master text styles</a:t>
             </a:r>
           </a:p>
@@ -2263,7 +2261,7 @@
           <a:p>
             <a:fld id="{5BCAD085-E8A6-8845-BD4E-CB4CCA059FC4}" type="datetimeFigureOut">
               <a:rPr lang="en-US" smtClean="0"/>
-              <a:t>1/27/13</a:t>
+              <a:t>7/5/2026</a:t>
             </a:fld>
             <a:endParaRPr lang="en-US"/>
           </a:p>
@@ -2366,10 +2364,9 @@
           </a:lstStyle>
           <a:p>
             <a:r>
-              <a:rPr lang="en-US" smtClean="0"/>
+              <a:rPr lang="en-US"/>
               <a:t>Click to edit Master title style</a:t>
             </a:r>
-            <a:endParaRPr lang="en-US"/>
           </a:p>
         </p:txBody>
       </p:sp>
@@ -2493,7 +2490,7 @@
           <a:p>
             <a:pPr lvl="0"/>
             <a:r>
-              <a:rPr lang="en-US" smtClean="0"/>
+              <a:rPr lang="en-US"/>
               <a:t>Click to edit Master text styles</a:t>
             </a:r>
           </a:p>
@@ -2516,7 +2513,7 @@
           <a:p>
             <a:fld id="{5BCAD085-E8A6-8845-BD4E-CB4CCA059FC4}" type="datetimeFigureOut">
               <a:rPr lang="en-US" smtClean="0"/>
-              <a:t>1/27/13</a:t>
+              <a:t>7/5/2026</a:t>
             </a:fld>
             <a:endParaRPr lang="en-US"/>
           </a:p>
@@ -2625,10 +2622,9 @@
           <a:lstStyle/>
           <a:p>
             <a:r>
-              <a:rPr lang="en-US" smtClean="0"/>
+              <a:rPr lang="en-US"/>
               <a:t>Click to edit Master title style</a:t>
             </a:r>
-            <a:endParaRPr lang="en-US"/>
           </a:p>
         </p:txBody>
       </p:sp>
@@ -2659,38 +2655,37 @@
           <a:p>
             <a:pPr lvl="0"/>
             <a:r>
-              <a:rPr lang="en-US" smtClean="0"/>
+              <a:rPr lang="en-US"/>
               <a:t>Click to edit Master text styles</a:t>
             </a:r>
           </a:p>
           <a:p>
             <a:pPr lvl="1"/>
             <a:r>
-              <a:rPr lang="en-US" smtClean="0"/>
+              <a:rPr lang="en-US"/>
               <a:t>Second level</a:t>
             </a:r>
           </a:p>
           <a:p>
             <a:pPr lvl="2"/>
             <a:r>
-              <a:rPr lang="en-US" smtClean="0"/>
+              <a:rPr lang="en-US"/>
               <a:t>Third level</a:t>
             </a:r>
           </a:p>
           <a:p>
             <a:pPr lvl="3"/>
             <a:r>
-              <a:rPr lang="en-US" smtClean="0"/>
+              <a:rPr lang="en-US"/>
               <a:t>Fourth level</a:t>
             </a:r>
           </a:p>
           <a:p>
             <a:pPr lvl="4"/>
             <a:r>
-              <a:rPr lang="en-US" smtClean="0"/>
+              <a:rPr lang="en-US"/>
               <a:t>Fifth level</a:t>
             </a:r>
-            <a:endParaRPr lang="en-US"/>
           </a:p>
         </p:txBody>
       </p:sp>
@@ -2729,7 +2724,7 @@
           <a:p>
             <a:fld id="{5BCAD085-E8A6-8845-BD4E-CB4CCA059FC4}" type="datetimeFigureOut">
               <a:rPr lang="en-US" smtClean="0"/>
-              <a:t>1/27/13</a:t>
+              <a:t>7/5/2026</a:t>
             </a:fld>
             <a:endParaRPr lang="en-US"/>
           </a:p>
@@ -3088,7 +3083,7 @@
 </file>
 
 <file path=ppt/slides/slide1.xml><?xml version="1.0" encoding="utf-8"?>
-<p:sld xmlns:a="http://schemas.openxmlformats.org/drawingml/2006/main" xmlns:p="http://schemas.openxmlformats.org/presentationml/2006/main" xmlns:r="http://schemas.openxmlformats.org/officeDocument/2006/relationships">
+<p:sld xmlns:a="http://schemas.openxmlformats.org/drawingml/2006/main" xmlns:r="http://schemas.openxmlformats.org/officeDocument/2006/relationships" xmlns:p="http://schemas.openxmlformats.org/presentationml/2006/main">
   <p:cSld>
     <p:bg>
       <p:bgPr>
@@ -3104,7 +3099,14 @@
         <p:cNvGrpSpPr/>
         <p:nvPr/>
       </p:nvGrpSpPr>
-      <p:grpSpPr/>
+      <p:grpSpPr>
+        <a:xfrm>
+          <a:off x="0" y="0"/>
+          <a:ext cx="0" cy="0"/>
+          <a:chOff x="0" y="0"/>
+          <a:chExt cx="0" cy="0"/>
+        </a:xfrm>
+      </p:grpSpPr>
       <p:sp>
         <p:nvSpPr>
           <p:cNvPr id="2" name="Rectangle 1"/>
@@ -3128,7 +3130,7 @@
                 <a:srgbClr val="A855F7"/>
               </a:gs>
             </a:gsLst>
-            <a:lin scaled="0" ang="0"/>
+            <a:lin ang="0" scaled="0"/>
           </a:gradFill>
           <a:ln>
             <a:noFill/>
@@ -3154,6 +3156,7 @@
           <a:lstStyle/>
           <a:p>
             <a:pPr algn="ctr"/>
+            <a:endParaRPr/>
           </a:p>
         </p:txBody>
       </p:sp>
@@ -3180,7 +3183,7 @@
                 <a:srgbClr val="A855F7"/>
               </a:gs>
             </a:gsLst>
-            <a:lin scaled="0" ang="0"/>
+            <a:lin ang="0" scaled="0"/>
           </a:gradFill>
           <a:ln>
             <a:noFill/>
@@ -3206,6 +3209,7 @@
           <a:lstStyle/>
           <a:p>
             <a:pPr algn="ctr"/>
+            <a:endParaRPr/>
           </a:p>
         </p:txBody>
       </p:sp>
@@ -3385,7 +3389,7 @@
           </a:fontRef>
         </p:style>
         <p:txBody>
-          <a:bodyPr rtlCol="0" anchor="ctr" wrap="none" tIns="0" bIns="0"/>
+          <a:bodyPr wrap="none" tIns="0" bIns="0" rtlCol="0" anchor="ctr"/>
           <a:lstStyle/>
           <a:p>
             <a:pPr algn="ctr"/>
@@ -3442,7 +3446,7 @@
           </a:fontRef>
         </p:style>
         <p:txBody>
-          <a:bodyPr rtlCol="0" anchor="ctr" wrap="none" tIns="0" bIns="0"/>
+          <a:bodyPr wrap="none" tIns="0" bIns="0" rtlCol="0" anchor="ctr"/>
           <a:lstStyle/>
           <a:p>
             <a:pPr algn="ctr"/>
@@ -3499,7 +3503,7 @@
           </a:fontRef>
         </p:style>
         <p:txBody>
-          <a:bodyPr rtlCol="0" anchor="ctr" wrap="none" tIns="0" bIns="0"/>
+          <a:bodyPr wrap="none" tIns="0" bIns="0" rtlCol="0" anchor="ctr"/>
           <a:lstStyle/>
           <a:p>
             <a:pPr algn="ctr"/>
@@ -3524,7 +3528,7 @@
         <p:spPr>
           <a:xfrm>
             <a:off x="640080" y="6035040"/>
-            <a:ext cx="10972800" cy="457200"/>
+            <a:ext cx="10972800" cy="292388"/>
           </a:xfrm>
           <a:prstGeom prst="rect">
             <a:avLst/>
@@ -3546,13 +3550,49 @@
               </a:spcAft>
             </a:pPr>
             <a:r>
+              <a:rPr sz="1300" b="0" dirty="0">
+                <a:solidFill>
+                  <a:srgbClr val="94A3B8"/>
+                </a:solidFill>
+                <a:latin typeface="Segoe UI"/>
+              </a:rPr>
+              <a:t>Zidane </a:t>
+            </a:r>
+            <a:r>
               <a:rPr sz="1300" b="0">
                 <a:solidFill>
                   <a:srgbClr val="94A3B8"/>
                 </a:solidFill>
                 <a:latin typeface="Segoe UI"/>
               </a:rPr>
-              <a:t>Zidane &amp; team — built with Claude</a:t>
+              <a:t>&amp; </a:t>
+            </a:r>
+            <a:r>
+              <a:rPr lang="en-US" sz="1300" b="0">
+                <a:solidFill>
+                  <a:srgbClr val="94A3B8"/>
+                </a:solidFill>
+                <a:latin typeface="Segoe UI"/>
+              </a:rPr>
+              <a:t>Pavan</a:t>
+            </a:r>
+            <a:r>
+              <a:rPr sz="1300" b="0">
+                <a:solidFill>
+                  <a:srgbClr val="94A3B8"/>
+                </a:solidFill>
+                <a:latin typeface="Segoe UI"/>
+              </a:rPr>
+              <a:t> </a:t>
+            </a:r>
+            <a:r>
+              <a:rPr sz="1300" b="0" dirty="0">
+                <a:solidFill>
+                  <a:srgbClr val="94A3B8"/>
+                </a:solidFill>
+                <a:latin typeface="Segoe UI"/>
+              </a:rPr>
+              <a:t>— built with Claude</a:t>
             </a:r>
           </a:p>
         </p:txBody>
@@ -3566,7 +3606,7 @@
 </file>
 
 <file path=ppt/slides/slide10.xml><?xml version="1.0" encoding="utf-8"?>
-<p:sld xmlns:a="http://schemas.openxmlformats.org/drawingml/2006/main" xmlns:p="http://schemas.openxmlformats.org/presentationml/2006/main" xmlns:r="http://schemas.openxmlformats.org/officeDocument/2006/relationships">
+<p:sld xmlns:a="http://schemas.openxmlformats.org/drawingml/2006/main" xmlns:r="http://schemas.openxmlformats.org/officeDocument/2006/relationships" xmlns:p="http://schemas.openxmlformats.org/presentationml/2006/main">
   <p:cSld>
     <p:bg>
       <p:bgPr>
@@ -3582,7 +3622,14 @@
         <p:cNvGrpSpPr/>
         <p:nvPr/>
       </p:nvGrpSpPr>
-      <p:grpSpPr/>
+      <p:grpSpPr>
+        <a:xfrm>
+          <a:off x="0" y="0"/>
+          <a:ext cx="0" cy="0"/>
+          <a:chOff x="0" y="0"/>
+          <a:chExt cx="0" cy="0"/>
+        </a:xfrm>
+      </p:grpSpPr>
       <p:sp>
         <p:nvSpPr>
           <p:cNvPr id="2" name="Rectangle 1"/>
@@ -3606,7 +3653,7 @@
                 <a:srgbClr val="A855F7"/>
               </a:gs>
             </a:gsLst>
-            <a:lin scaled="0" ang="0"/>
+            <a:lin ang="0" scaled="0"/>
           </a:gradFill>
           <a:ln>
             <a:noFill/>
@@ -3632,6 +3679,7 @@
           <a:lstStyle/>
           <a:p>
             <a:pPr algn="ctr"/>
+            <a:endParaRPr/>
           </a:p>
         </p:txBody>
       </p:sp>
@@ -4019,6 +4067,7 @@
           <a:lstStyle/>
           <a:p>
             <a:pPr algn="ctr"/>
+            <a:endParaRPr/>
           </a:p>
         </p:txBody>
       </p:sp>
@@ -4110,7 +4159,7 @@
 </file>
 
 <file path=ppt/slides/slide2.xml><?xml version="1.0" encoding="utf-8"?>
-<p:sld xmlns:a="http://schemas.openxmlformats.org/drawingml/2006/main" xmlns:p="http://schemas.openxmlformats.org/presentationml/2006/main" xmlns:r="http://schemas.openxmlformats.org/officeDocument/2006/relationships">
+<p:sld xmlns:a="http://schemas.openxmlformats.org/drawingml/2006/main" xmlns:r="http://schemas.openxmlformats.org/officeDocument/2006/relationships" xmlns:p="http://schemas.openxmlformats.org/presentationml/2006/main">
   <p:cSld>
     <p:bg>
       <p:bgPr>
@@ -4126,7 +4175,14 @@
         <p:cNvGrpSpPr/>
         <p:nvPr/>
       </p:nvGrpSpPr>
-      <p:grpSpPr/>
+      <p:grpSpPr>
+        <a:xfrm>
+          <a:off x="0" y="0"/>
+          <a:ext cx="0" cy="0"/>
+          <a:chOff x="0" y="0"/>
+          <a:chExt cx="0" cy="0"/>
+        </a:xfrm>
+      </p:grpSpPr>
       <p:sp>
         <p:nvSpPr>
           <p:cNvPr id="2" name="Rectangle 1"/>
@@ -4150,7 +4206,7 @@
                 <a:srgbClr val="A855F7"/>
               </a:gs>
             </a:gsLst>
-            <a:lin scaled="0" ang="0"/>
+            <a:lin ang="0" scaled="0"/>
           </a:gradFill>
           <a:ln>
             <a:noFill/>
@@ -4176,6 +4232,7 @@
           <a:lstStyle/>
           <a:p>
             <a:pPr algn="ctr"/>
+            <a:endParaRPr/>
           </a:p>
         </p:txBody>
       </p:sp>
@@ -4445,6 +4502,7 @@
           <a:lstStyle/>
           <a:p>
             <a:pPr algn="ctr"/>
+            <a:endParaRPr/>
           </a:p>
         </p:txBody>
       </p:sp>
@@ -4613,7 +4671,7 @@
 </file>
 
 <file path=ppt/slides/slide3.xml><?xml version="1.0" encoding="utf-8"?>
-<p:sld xmlns:a="http://schemas.openxmlformats.org/drawingml/2006/main" xmlns:p="http://schemas.openxmlformats.org/presentationml/2006/main" xmlns:r="http://schemas.openxmlformats.org/officeDocument/2006/relationships">
+<p:sld xmlns:a="http://schemas.openxmlformats.org/drawingml/2006/main" xmlns:r="http://schemas.openxmlformats.org/officeDocument/2006/relationships" xmlns:p="http://schemas.openxmlformats.org/presentationml/2006/main">
   <p:cSld>
     <p:bg>
       <p:bgPr>
@@ -4629,7 +4687,14 @@
         <p:cNvGrpSpPr/>
         <p:nvPr/>
       </p:nvGrpSpPr>
-      <p:grpSpPr/>
+      <p:grpSpPr>
+        <a:xfrm>
+          <a:off x="0" y="0"/>
+          <a:ext cx="0" cy="0"/>
+          <a:chOff x="0" y="0"/>
+          <a:chExt cx="0" cy="0"/>
+        </a:xfrm>
+      </p:grpSpPr>
       <p:sp>
         <p:nvSpPr>
           <p:cNvPr id="2" name="Rectangle 1"/>
@@ -4653,7 +4718,7 @@
                 <a:srgbClr val="A855F7"/>
               </a:gs>
             </a:gsLst>
-            <a:lin scaled="0" ang="0"/>
+            <a:lin ang="0" scaled="0"/>
           </a:gradFill>
           <a:ln>
             <a:noFill/>
@@ -4679,6 +4744,7 @@
           <a:lstStyle/>
           <a:p>
             <a:pPr algn="ctr"/>
+            <a:endParaRPr/>
           </a:p>
         </p:txBody>
       </p:sp>
@@ -4853,6 +4919,7 @@
           <a:lstStyle/>
           <a:p>
             <a:pPr algn="ctr"/>
+            <a:endParaRPr/>
           </a:p>
         </p:txBody>
       </p:sp>
@@ -4962,6 +5029,7 @@
           <a:lstStyle/>
           <a:p>
             <a:pPr algn="ctr"/>
+            <a:endParaRPr/>
           </a:p>
         </p:txBody>
       </p:sp>
@@ -5071,6 +5139,7 @@
           <a:lstStyle/>
           <a:p>
             <a:pPr algn="ctr"/>
+            <a:endParaRPr/>
           </a:p>
         </p:txBody>
       </p:sp>
@@ -5186,7 +5255,7 @@
 </file>
 
 <file path=ppt/slides/slide4.xml><?xml version="1.0" encoding="utf-8"?>
-<p:sld xmlns:a="http://schemas.openxmlformats.org/drawingml/2006/main" xmlns:p="http://schemas.openxmlformats.org/presentationml/2006/main" xmlns:r="http://schemas.openxmlformats.org/officeDocument/2006/relationships">
+<p:sld xmlns:a="http://schemas.openxmlformats.org/drawingml/2006/main" xmlns:r="http://schemas.openxmlformats.org/officeDocument/2006/relationships" xmlns:p="http://schemas.openxmlformats.org/presentationml/2006/main">
   <p:cSld>
     <p:bg>
       <p:bgPr>
@@ -5202,7 +5271,14 @@
         <p:cNvGrpSpPr/>
         <p:nvPr/>
       </p:nvGrpSpPr>
-      <p:grpSpPr/>
+      <p:grpSpPr>
+        <a:xfrm>
+          <a:off x="0" y="0"/>
+          <a:ext cx="0" cy="0"/>
+          <a:chOff x="0" y="0"/>
+          <a:chExt cx="0" cy="0"/>
+        </a:xfrm>
+      </p:grpSpPr>
       <p:sp>
         <p:nvSpPr>
           <p:cNvPr id="2" name="Rectangle 1"/>
@@ -5226,7 +5302,7 @@
                 <a:srgbClr val="A855F7"/>
               </a:gs>
             </a:gsLst>
-            <a:lin scaled="0" ang="0"/>
+            <a:lin ang="0" scaled="0"/>
           </a:gradFill>
           <a:ln>
             <a:noFill/>
@@ -5252,6 +5328,7 @@
           <a:lstStyle/>
           <a:p>
             <a:pPr algn="ctr"/>
+            <a:endParaRPr/>
           </a:p>
         </p:txBody>
       </p:sp>
@@ -5384,6 +5461,7 @@
           <a:lstStyle/>
           <a:p>
             <a:pPr algn="ctr"/>
+            <a:endParaRPr/>
           </a:p>
         </p:txBody>
       </p:sp>
@@ -5536,6 +5614,7 @@
           <a:lstStyle/>
           <a:p>
             <a:pPr algn="ctr"/>
+            <a:endParaRPr/>
           </a:p>
         </p:txBody>
       </p:sp>
@@ -5688,6 +5767,7 @@
           <a:lstStyle/>
           <a:p>
             <a:pPr algn="ctr"/>
+            <a:endParaRPr/>
           </a:p>
         </p:txBody>
       </p:sp>
@@ -5840,6 +5920,7 @@
           <a:lstStyle/>
           <a:p>
             <a:pPr algn="ctr"/>
+            <a:endParaRPr/>
           </a:p>
         </p:txBody>
       </p:sp>
@@ -5992,6 +6073,7 @@
           <a:lstStyle/>
           <a:p>
             <a:pPr algn="ctr"/>
+            <a:endParaRPr/>
           </a:p>
         </p:txBody>
       </p:sp>
@@ -6155,7 +6237,7 @@
 </file>
 
 <file path=ppt/slides/slide5.xml><?xml version="1.0" encoding="utf-8"?>
-<p:sld xmlns:a="http://schemas.openxmlformats.org/drawingml/2006/main" xmlns:p="http://schemas.openxmlformats.org/presentationml/2006/main" xmlns:r="http://schemas.openxmlformats.org/officeDocument/2006/relationships">
+<p:sld xmlns:a="http://schemas.openxmlformats.org/drawingml/2006/main" xmlns:r="http://schemas.openxmlformats.org/officeDocument/2006/relationships" xmlns:p="http://schemas.openxmlformats.org/presentationml/2006/main">
   <p:cSld>
     <p:bg>
       <p:bgPr>
@@ -6171,7 +6253,14 @@
         <p:cNvGrpSpPr/>
         <p:nvPr/>
       </p:nvGrpSpPr>
-      <p:grpSpPr/>
+      <p:grpSpPr>
+        <a:xfrm>
+          <a:off x="0" y="0"/>
+          <a:ext cx="0" cy="0"/>
+          <a:chOff x="0" y="0"/>
+          <a:chExt cx="0" cy="0"/>
+        </a:xfrm>
+      </p:grpSpPr>
       <p:sp>
         <p:nvSpPr>
           <p:cNvPr id="2" name="Rectangle 1"/>
@@ -6195,7 +6284,7 @@
                 <a:srgbClr val="A855F7"/>
               </a:gs>
             </a:gsLst>
-            <a:lin scaled="0" ang="0"/>
+            <a:lin ang="0" scaled="0"/>
           </a:gradFill>
           <a:ln>
             <a:noFill/>
@@ -6221,6 +6310,7 @@
           <a:lstStyle/>
           <a:p>
             <a:pPr algn="ctr"/>
+            <a:endParaRPr/>
           </a:p>
         </p:txBody>
       </p:sp>
@@ -6351,6 +6441,7 @@
           <a:lstStyle/>
           <a:p>
             <a:pPr algn="ctr"/>
+            <a:endParaRPr/>
           </a:p>
         </p:txBody>
       </p:sp>
@@ -6523,6 +6614,7 @@
           <a:lstStyle/>
           <a:p>
             <a:pPr algn="ctr"/>
+            <a:endParaRPr/>
           </a:p>
         </p:txBody>
       </p:sp>
@@ -6695,6 +6787,7 @@
           <a:lstStyle/>
           <a:p>
             <a:pPr algn="ctr"/>
+            <a:endParaRPr/>
           </a:p>
         </p:txBody>
       </p:sp>
@@ -6867,6 +6960,7 @@
           <a:lstStyle/>
           <a:p>
             <a:pPr algn="ctr"/>
+            <a:endParaRPr/>
           </a:p>
         </p:txBody>
       </p:sp>
@@ -7039,6 +7133,7 @@
           <a:lstStyle/>
           <a:p>
             <a:pPr algn="ctr"/>
+            <a:endParaRPr/>
           </a:p>
         </p:txBody>
       </p:sp>
@@ -7211,6 +7306,7 @@
           <a:lstStyle/>
           <a:p>
             <a:pPr algn="ctr"/>
+            <a:endParaRPr/>
           </a:p>
         </p:txBody>
       </p:sp>
@@ -7391,7 +7487,7 @@
 </file>
 
 <file path=ppt/slides/slide6.xml><?xml version="1.0" encoding="utf-8"?>
-<p:sld xmlns:a="http://schemas.openxmlformats.org/drawingml/2006/main" xmlns:p="http://schemas.openxmlformats.org/presentationml/2006/main" xmlns:r="http://schemas.openxmlformats.org/officeDocument/2006/relationships">
+<p:sld xmlns:a="http://schemas.openxmlformats.org/drawingml/2006/main" xmlns:r="http://schemas.openxmlformats.org/officeDocument/2006/relationships" xmlns:p="http://schemas.openxmlformats.org/presentationml/2006/main">
   <p:cSld>
     <p:bg>
       <p:bgPr>
@@ -7407,7 +7503,14 @@
         <p:cNvGrpSpPr/>
         <p:nvPr/>
       </p:nvGrpSpPr>
-      <p:grpSpPr/>
+      <p:grpSpPr>
+        <a:xfrm>
+          <a:off x="0" y="0"/>
+          <a:ext cx="0" cy="0"/>
+          <a:chOff x="0" y="0"/>
+          <a:chExt cx="0" cy="0"/>
+        </a:xfrm>
+      </p:grpSpPr>
       <p:sp>
         <p:nvSpPr>
           <p:cNvPr id="2" name="Rectangle 1"/>
@@ -7431,7 +7534,7 @@
                 <a:srgbClr val="A855F7"/>
               </a:gs>
             </a:gsLst>
-            <a:lin scaled="0" ang="0"/>
+            <a:lin ang="0" scaled="0"/>
           </a:gradFill>
           <a:ln>
             <a:noFill/>
@@ -7457,6 +7560,7 @@
           <a:lstStyle/>
           <a:p>
             <a:pPr algn="ctr"/>
+            <a:endParaRPr/>
           </a:p>
         </p:txBody>
       </p:sp>
@@ -7726,6 +7830,7 @@
           <a:lstStyle/>
           <a:p>
             <a:pPr algn="ctr"/>
+            <a:endParaRPr/>
           </a:p>
         </p:txBody>
       </p:sp>
@@ -7913,7 +8018,7 @@
 </file>
 
 <file path=ppt/slides/slide7.xml><?xml version="1.0" encoding="utf-8"?>
-<p:sld xmlns:a="http://schemas.openxmlformats.org/drawingml/2006/main" xmlns:p="http://schemas.openxmlformats.org/presentationml/2006/main" xmlns:r="http://schemas.openxmlformats.org/officeDocument/2006/relationships">
+<p:sld xmlns:a="http://schemas.openxmlformats.org/drawingml/2006/main" xmlns:r="http://schemas.openxmlformats.org/officeDocument/2006/relationships" xmlns:p="http://schemas.openxmlformats.org/presentationml/2006/main">
   <p:cSld>
     <p:bg>
       <p:bgPr>
@@ -7929,7 +8034,14 @@
         <p:cNvGrpSpPr/>
         <p:nvPr/>
       </p:nvGrpSpPr>
-      <p:grpSpPr/>
+      <p:grpSpPr>
+        <a:xfrm>
+          <a:off x="0" y="0"/>
+          <a:ext cx="0" cy="0"/>
+          <a:chOff x="0" y="0"/>
+          <a:chExt cx="0" cy="0"/>
+        </a:xfrm>
+      </p:grpSpPr>
       <p:sp>
         <p:nvSpPr>
           <p:cNvPr id="2" name="Rectangle 1"/>
@@ -7953,7 +8065,7 @@
                 <a:srgbClr val="A855F7"/>
               </a:gs>
             </a:gsLst>
-            <a:lin scaled="0" ang="0"/>
+            <a:lin ang="0" scaled="0"/>
           </a:gradFill>
           <a:ln>
             <a:noFill/>
@@ -7979,6 +8091,7 @@
           <a:lstStyle/>
           <a:p>
             <a:pPr algn="ctr"/>
+            <a:endParaRPr/>
           </a:p>
         </p:txBody>
       </p:sp>
@@ -8111,6 +8224,7 @@
           <a:lstStyle/>
           <a:p>
             <a:pPr algn="ctr"/>
+            <a:endParaRPr/>
           </a:p>
         </p:txBody>
       </p:sp>
@@ -8239,6 +8353,7 @@
           <a:lstStyle/>
           <a:p>
             <a:pPr algn="ctr"/>
+            <a:endParaRPr/>
           </a:p>
         </p:txBody>
       </p:sp>
@@ -8367,6 +8482,7 @@
           <a:lstStyle/>
           <a:p>
             <a:pPr algn="ctr"/>
+            <a:endParaRPr/>
           </a:p>
         </p:txBody>
       </p:sp>
@@ -8459,7 +8575,7 @@
 </file>
 
 <file path=ppt/slides/slide8.xml><?xml version="1.0" encoding="utf-8"?>
-<p:sld xmlns:a="http://schemas.openxmlformats.org/drawingml/2006/main" xmlns:p="http://schemas.openxmlformats.org/presentationml/2006/main" xmlns:r="http://schemas.openxmlformats.org/officeDocument/2006/relationships">
+<p:sld xmlns:a="http://schemas.openxmlformats.org/drawingml/2006/main" xmlns:r="http://schemas.openxmlformats.org/officeDocument/2006/relationships" xmlns:p="http://schemas.openxmlformats.org/presentationml/2006/main">
   <p:cSld>
     <p:bg>
       <p:bgPr>
@@ -8475,7 +8591,14 @@
         <p:cNvGrpSpPr/>
         <p:nvPr/>
       </p:nvGrpSpPr>
-      <p:grpSpPr/>
+      <p:grpSpPr>
+        <a:xfrm>
+          <a:off x="0" y="0"/>
+          <a:ext cx="0" cy="0"/>
+          <a:chOff x="0" y="0"/>
+          <a:chExt cx="0" cy="0"/>
+        </a:xfrm>
+      </p:grpSpPr>
       <p:sp>
         <p:nvSpPr>
           <p:cNvPr id="2" name="Rectangle 1"/>
@@ -8499,7 +8622,7 @@
                 <a:srgbClr val="A855F7"/>
               </a:gs>
             </a:gsLst>
-            <a:lin scaled="0" ang="0"/>
+            <a:lin ang="0" scaled="0"/>
           </a:gradFill>
           <a:ln>
             <a:noFill/>
@@ -8525,6 +8648,7 @@
           <a:lstStyle/>
           <a:p>
             <a:pPr algn="ctr"/>
+            <a:endParaRPr/>
           </a:p>
         </p:txBody>
       </p:sp>
@@ -8813,6 +8937,7 @@
           <a:lstStyle/>
           <a:p>
             <a:pPr algn="ctr"/>
+            <a:endParaRPr/>
           </a:p>
         </p:txBody>
       </p:sp>
@@ -9000,7 +9125,7 @@
 </file>
 
 <file path=ppt/slides/slide9.xml><?xml version="1.0" encoding="utf-8"?>
-<p:sld xmlns:a="http://schemas.openxmlformats.org/drawingml/2006/main" xmlns:p="http://schemas.openxmlformats.org/presentationml/2006/main" xmlns:r="http://schemas.openxmlformats.org/officeDocument/2006/relationships">
+<p:sld xmlns:a="http://schemas.openxmlformats.org/drawingml/2006/main" xmlns:r="http://schemas.openxmlformats.org/officeDocument/2006/relationships" xmlns:p="http://schemas.openxmlformats.org/presentationml/2006/main">
   <p:cSld>
     <p:bg>
       <p:bgPr>
@@ -9016,7 +9141,14 @@
         <p:cNvGrpSpPr/>
         <p:nvPr/>
       </p:nvGrpSpPr>
-      <p:grpSpPr/>
+      <p:grpSpPr>
+        <a:xfrm>
+          <a:off x="0" y="0"/>
+          <a:ext cx="0" cy="0"/>
+          <a:chOff x="0" y="0"/>
+          <a:chExt cx="0" cy="0"/>
+        </a:xfrm>
+      </p:grpSpPr>
       <p:sp>
         <p:nvSpPr>
           <p:cNvPr id="2" name="Rectangle 1"/>
@@ -9040,7 +9172,7 @@
                 <a:srgbClr val="A855F7"/>
               </a:gs>
             </a:gsLst>
-            <a:lin scaled="0" ang="0"/>
+            <a:lin ang="0" scaled="0"/>
           </a:gradFill>
           <a:ln>
             <a:noFill/>
@@ -9066,6 +9198,7 @@
           <a:lstStyle/>
           <a:p>
             <a:pPr algn="ctr"/>
+            <a:endParaRPr/>
           </a:p>
         </p:txBody>
       </p:sp>
@@ -9198,6 +9331,7 @@
           <a:lstStyle/>
           <a:p>
             <a:pPr algn="ctr"/>
+            <a:endParaRPr/>
           </a:p>
         </p:txBody>
       </p:sp>
@@ -9372,6 +9506,7 @@
           <a:lstStyle/>
           <a:p>
             <a:pPr algn="ctr"/>
+            <a:endParaRPr/>
           </a:p>
         </p:txBody>
       </p:sp>
@@ -9546,6 +9681,7 @@
           <a:lstStyle/>
           <a:p>
             <a:pPr algn="ctr"/>
+            <a:endParaRPr/>
           </a:p>
         </p:txBody>
       </p:sp>
@@ -9720,6 +9856,7 @@
           <a:lstStyle/>
           <a:p>
             <a:pPr algn="ctr"/>
+            <a:endParaRPr/>
           </a:p>
         </p:txBody>
       </p:sp>
@@ -9894,6 +10031,7 @@
           <a:lstStyle/>
           <a:p>
             <a:pPr algn="ctr"/>
+            <a:endParaRPr/>
           </a:p>
         </p:txBody>
       </p:sp>
